--- a/Quadro_Aulas_Report_2026-06-26.pptx
+++ b/Quadro_Aulas_Report_2026-06-26.pptx
@@ -1038,7 +1038,7 @@
                   <a:srgbClr val="8FA3C0"/>
                 </a:solidFill>
               </a:rPr>
-              <a:t>26 de Junho de 2026 as 09:30</a:t>
+              <a:t>26 de Junho de 2026 as 18:44</a:t>
             </a:r>
             <a:endParaRPr lang="en-US" sz="700" dirty="0"/>
           </a:p>
@@ -1207,7 +1207,7 @@
                   <a:srgbClr val="4ADE80"/>
                 </a:solidFill>
               </a:rPr>
-              <a:t>331</a:t>
+              <a:t>332</a:t>
             </a:r>
             <a:endParaRPr lang="en-US" sz="2400" dirty="0"/>
           </a:p>
@@ -1351,7 +1351,7 @@
                   <a:srgbClr val="F87171"/>
                 </a:solidFill>
               </a:rPr>
-              <a:t>36</a:t>
+              <a:t>35</a:t>
             </a:r>
             <a:endParaRPr lang="en-US" sz="2400" dirty="0"/>
           </a:p>
@@ -1427,7 +1427,7 @@
         <p:spPr>
           <a:xfrm>
             <a:off x="137160" y="3538728"/>
-            <a:ext cx="1728216" cy="91440"/>
+            <a:ext cx="1748790" cy="91440"/>
           </a:xfrm>
           <a:prstGeom prst="rect">
             <a:avLst/>
@@ -1473,7 +1473,7 @@
                   <a:srgbClr val="8FA3C0"/>
                 </a:solidFill>
               </a:rPr>
-              <a:t>84% concluido  .  331 de 392 itens</a:t>
+              <a:t>85% concluido  .  332 de 392 itens</a:t>
             </a:r>
             <a:endParaRPr lang="en-US" sz="700" dirty="0"/>
           </a:p>
@@ -1818,7 +1818,7 @@
                   <a:srgbClr val="222222"/>
                 </a:solidFill>
               </a:rPr>
-              <a:t>5 Stories · 3 NFT · 70 itens</a:t>
+              <a:t>5 Stories · 3 NFT · 71 itens</a:t>
             </a:r>
             <a:endParaRPr lang="en-US" sz="750" dirty="0"/>
           </a:p>
@@ -1854,7 +1854,7 @@
                   <a:srgbClr val="222222"/>
                 </a:solidFill>
               </a:rPr>
-              <a:t>A Fazer: 1 . Em progresso: 0 . Finalizados: 69</a:t>
+              <a:t>A Fazer: 1 . Em progresso: 0 . Finalizados: 70</a:t>
             </a:r>
             <a:endParaRPr lang="en-US" sz="750" dirty="0"/>
           </a:p>
@@ -1890,7 +1890,7 @@
                   <a:srgbClr val="222222"/>
                 </a:solidFill>
               </a:rPr>
-              <a:t>Est: 274h . Real: 280.3h . Rem: 1h</a:t>
+              <a:t>Est: 274h . Real: 294.3h . Rem: 1h</a:t>
             </a:r>
             <a:endParaRPr lang="en-US" sz="750" dirty="0"/>
           </a:p>
@@ -2062,7 +2062,7 @@
                   <a:srgbClr val="888888"/>
                 </a:solidFill>
               </a:rPr>
-              <a:t>Subs: 99% · 69 de 70</a:t>
+              <a:t>Subs: 99% · 70 de 71</a:t>
             </a:r>
             <a:endParaRPr lang="en-US" sz="650" dirty="0"/>
           </a:p>
@@ -2098,7 +2098,7 @@
                   <a:srgbClr val="1D9E75"/>
                 </a:solidFill>
               </a:rPr>
-              <a:t>Projetado: 281.3h (+7.3h / +3%)</a:t>
+              <a:t>Projetado: 295.3h (+21.3h / +8%)</a:t>
             </a:r>
             <a:endParaRPr lang="en-US" sz="800" dirty="0"/>
           </a:p>
@@ -2263,7 +2263,7 @@
                   <a:srgbClr val="222222"/>
                 </a:solidFill>
               </a:rPr>
-              <a:t>A Fazer: 7 . Em progresso: 0 . Finalizados: 107</a:t>
+              <a:t>A Fazer: 6 . Em progresso: 1 . Finalizados: 107</a:t>
             </a:r>
             <a:endParaRPr lang="en-US" sz="750" dirty="0"/>
           </a:p>
@@ -2299,7 +2299,7 @@
                   <a:srgbClr val="222222"/>
                 </a:solidFill>
               </a:rPr>
-              <a:t>Est: 432.5h . Real: 572.3h . Rem: 14.5h</a:t>
+              <a:t>Est: 432.5h . Real: 579.6h . Rem: 14.5h</a:t>
             </a:r>
             <a:endParaRPr lang="en-US" sz="750" dirty="0"/>
           </a:p>
@@ -2507,7 +2507,7 @@
                   <a:srgbClr val="DC2626"/>
                 </a:solidFill>
               </a:rPr>
-              <a:t>Projetado: 586.8h (+154.3h / +36%)</a:t>
+              <a:t>Projetado: 594.1h (+161.6h / +37%)</a:t>
             </a:r>
             <a:endParaRPr lang="en-US" sz="800" dirty="0"/>
           </a:p>
@@ -3634,7 +3634,7 @@
                   <a:srgbClr val="D97706"/>
                 </a:solidFill>
               </a:rPr>
-              <a:t>1290.9h</a:t>
+              <a:t>1302.2h</a:t>
             </a:r>
             <a:endParaRPr lang="en-US" sz="2400" dirty="0"/>
           </a:p>
@@ -3900,7 +3900,7 @@
                   <a:srgbClr val="D97706"/>
                 </a:solidFill>
               </a:rPr>
-              <a:t>+168.4h</a:t>
+              <a:t>+179.7h</a:t>
             </a:r>
             <a:endParaRPr lang="en-US" sz="2400" dirty="0"/>
           </a:p>
@@ -3936,7 +3936,7 @@
                   <a:srgbClr val="888888"/>
                 </a:solidFill>
               </a:rPr>
-              <a:t>projetado: 1417.4h (+13%)</a:t>
+              <a:t>projetado: 1428.7h (+14%)</a:t>
             </a:r>
             <a:endParaRPr lang="en-US" sz="700" dirty="0"/>
           </a:p>
@@ -3951,7 +3951,7 @@
         <p:spPr>
           <a:xfrm>
             <a:off x="2441448" y="2916936"/>
-            <a:ext cx="8785952" cy="54864"/>
+            <a:ext cx="8792762" cy="54864"/>
           </a:xfrm>
           <a:prstGeom prst="rect">
             <a:avLst/>
@@ -3975,8 +3975,8 @@
         </p:nvSpPr>
         <p:spPr>
           <a:xfrm>
-            <a:off x="11227400" y="2916936"/>
-            <a:ext cx="860968" cy="54864"/>
+            <a:off x="11234210" y="2916936"/>
+            <a:ext cx="854158" cy="54864"/>
           </a:xfrm>
           <a:prstGeom prst="rect">
             <a:avLst/>
@@ -6722,7 +6722,7 @@
                   <a:srgbClr val="D97706"/>
                 </a:solidFill>
               </a:rPr>
-              <a:t>234.2h · 43 subs finalizadas</a:t>
+              <a:t>245.6h · 44 subs finalizadas</a:t>
             </a:r>
             <a:endParaRPr lang="en-US" sz="950" dirty="0"/>
           </a:p>
@@ -7009,7 +7009,7 @@
                   <a:srgbClr val="888888"/>
                 </a:solidFill>
               </a:rPr>
-              <a:t>161.5h estimadas</a:t>
+              <a:t>165.5h estimadas</a:t>
             </a:r>
             <a:endParaRPr lang="en-US" sz="850" dirty="0"/>
           </a:p>

--- a/Quadro_Aulas_Report_2026-06-26.pptx
+++ b/Quadro_Aulas_Report_2026-06-26.pptx
@@ -1038,7 +1038,7 @@
                   <a:srgbClr val="8FA3C0"/>
                 </a:solidFill>
               </a:rPr>
-              <a:t>26 de Junho de 2026 as 18:44</a:t>
+              <a:t>26 de Junho de 2026 as 18:46</a:t>
             </a:r>
             <a:endParaRPr lang="en-US" sz="700" dirty="0"/>
           </a:p>
